--- a/slides/datasets-in-10-minutes-mrcr-v2.pptx
+++ b/slides/datasets-in-10-minutes-mrcr-v2.pptx
@@ -8311,7 +8311,7 @@
         </p:nvSpPr>
         <p:spPr>
           <a:xfrm>
-            <a:off x="594360" y="1389888"/>
+            <a:off x="594360" y="1566698"/>
             <a:ext cx="7955279" cy="210312"/>
           </a:xfrm>
           <a:prstGeom prst="rect">
@@ -8365,7 +8365,7 @@
         </p:nvSpPr>
         <p:spPr>
           <a:xfrm>
-            <a:off x="594360" y="1682496"/>
+            <a:off x="594360" y="1889354"/>
             <a:ext cx="7955279" cy="923544"/>
           </a:xfrm>
           <a:prstGeom prst="rect">
@@ -8419,7 +8419,7 @@
         </p:nvSpPr>
         <p:spPr>
           <a:xfrm>
-            <a:off x="594360" y="2724912"/>
+            <a:off x="594360" y="2651563"/>
             <a:ext cx="7955279" cy="640080"/>
           </a:xfrm>
           <a:prstGeom prst="rect">
@@ -8473,7 +8473,7 @@
         </p:nvSpPr>
         <p:spPr>
           <a:xfrm>
-            <a:off x="594360" y="3474720"/>
+            <a:off x="594360" y="3527345"/>
             <a:ext cx="7955279" cy="201168"/>
           </a:xfrm>
           <a:prstGeom prst="rect">
@@ -8527,7 +8527,7 @@
         </p:nvSpPr>
         <p:spPr>
           <a:xfrm>
-            <a:off x="548640" y="3707982"/>
+            <a:off x="548640" y="3856041"/>
             <a:ext cx="8046720" cy="514553"/>
           </a:xfrm>
           <a:prstGeom prst="rect">
@@ -8571,7 +8571,7 @@
         </p:nvSpPr>
         <p:spPr>
           <a:xfrm>
-            <a:off x="713232" y="3803904"/>
+            <a:off x="713232" y="3951962"/>
             <a:ext cx="7717536" cy="685800"/>
           </a:xfrm>
           <a:prstGeom prst="rect">
@@ -10464,7 +10464,7 @@
         </p:nvSpPr>
         <p:spPr>
           <a:xfrm>
-            <a:off x="594360" y="1389888"/>
+            <a:off x="594360" y="1566698"/>
             <a:ext cx="7955279" cy="210312"/>
           </a:xfrm>
           <a:prstGeom prst="rect">
@@ -10518,7 +10518,7 @@
         </p:nvSpPr>
         <p:spPr>
           <a:xfrm>
-            <a:off x="594360" y="1682496"/>
+            <a:off x="594360" y="1889354"/>
             <a:ext cx="7955279" cy="923544"/>
           </a:xfrm>
           <a:prstGeom prst="rect">
@@ -10572,7 +10572,7 @@
         </p:nvSpPr>
         <p:spPr>
           <a:xfrm>
-            <a:off x="594360" y="2724912"/>
+            <a:off x="594360" y="2651563"/>
             <a:ext cx="7955279" cy="640080"/>
           </a:xfrm>
           <a:prstGeom prst="rect">
@@ -10626,7 +10626,7 @@
         </p:nvSpPr>
         <p:spPr>
           <a:xfrm>
-            <a:off x="594360" y="3474720"/>
+            <a:off x="594360" y="3527345"/>
             <a:ext cx="7955279" cy="201168"/>
           </a:xfrm>
           <a:prstGeom prst="rect">
@@ -10680,7 +10680,7 @@
         </p:nvSpPr>
         <p:spPr>
           <a:xfrm>
-            <a:off x="548640" y="3707982"/>
+            <a:off x="548640" y="3856041"/>
             <a:ext cx="8046720" cy="514553"/>
           </a:xfrm>
           <a:prstGeom prst="rect">
@@ -10724,7 +10724,7 @@
         </p:nvSpPr>
         <p:spPr>
           <a:xfrm>
-            <a:off x="713232" y="3803904"/>
+            <a:off x="713232" y="3951962"/>
             <a:ext cx="7717536" cy="685800"/>
           </a:xfrm>
           <a:prstGeom prst="rect">
@@ -14257,7 +14257,7 @@
                 <a:ea typeface="Noto Sans CJK JP"/>
                 <a:cs typeface="Noto Sans"/>
               </a:rPr>
-              <a:t>MRCRを説明する原著の公開ページ</a:t>
+              <a:t>MRCR v2の公式リポジトリ</a:t>
             </a:r>
           </a:p>
         </p:txBody>
@@ -14305,35 +14305,11 @@
                 <a:ea typeface="Noto Sans CJK JP"/>
                 <a:cs typeface="Noto Sans"/>
               </a:rPr>
-              <a:t>MRCR: 原著論文</a:t>
+              <a:t>MRCR v2: 公式リポジトリ</a:t>
             </a:r>
           </a:p>
         </p:txBody>
       </p:sp>
-      <p:pic>
-        <p:nvPicPr>
-          <p:cNvPr id="4" name="Picture 3" descr="hf-page.png"/>
-          <p:cNvPicPr>
-            <a:picLocks noChangeAspect="1"/>
-          </p:cNvPicPr>
-          <p:nvPr/>
-        </p:nvPicPr>
-        <p:blipFill>
-          <a:blip r:embed="rId2"/>
-          <a:stretch>
-            <a:fillRect/>
-          </a:stretch>
-        </p:blipFill>
-        <p:spPr>
-          <a:xfrm>
-            <a:off x="2274570" y="1481328"/>
-            <a:ext cx="4594859" cy="3063240"/>
-          </a:xfrm>
-          <a:prstGeom prst="rect">
-            <a:avLst/>
-          </a:prstGeom>
-        </p:spPr>
-      </p:pic>
       <p:sp>
         <p:nvSpPr>
           <p:cNvPr id="5" name="TextBox 4"/>
@@ -14358,7 +14334,7 @@
           <a:p>
             <a:pPr algn="l">
               <a:lnSpc>
-                <a:spcPct val="112000"/>
+                <a:spcPct val="110000"/>
               </a:lnSpc>
               <a:spcBef>
                 <a:spcPts val="0"/>
@@ -14375,73 +14351,42 @@
               </a:defRPr>
             </a:pPr>
             <a:r>
-              <a:rPr sz="810" b="0" lang="ja-JP" altLang="en-US">
+              <a:rPr sz="1000">
                 <a:solidFill>
                   <a:srgbClr val="626669"/>
                 </a:solidFill>
                 <a:latin typeface="Noto Sans"/>
-                <a:ea typeface="Noto Sans CJK JP"/>
-                <a:cs typeface="Noto Sans"/>
-              </a:rPr>
-              <a:t/>
-            </a:r>
-            <a:r>
-              <a:rPr sz="810" b="0" lang="ja-JP" altLang="en-US">
-                <a:solidFill>
-                  <a:srgbClr val="626669"/>
-                </a:solidFill>
-                <a:latin typeface="Noto Sans"/>
-                <a:ea typeface="Noto Sans CJK JP"/>
-                <a:cs typeface="Noto Sans"/>
-              </a:rPr>
-              <a:t>Vodrahalli et al. (2024). Michelangelo: Long Context Evaluations Beyond Haystacks via Latent Structure Queries. arXiv v2。</a:t>
-            </a:r>
-            <a:r>
-              <a:rPr sz="810" b="0" lang="ja-JP" altLang="en-US">
-                <a:solidFill>
-                  <a:srgbClr val="626669"/>
-                </a:solidFill>
-                <a:latin typeface="Noto Sans"/>
-                <a:ea typeface="Noto Sans CJK JP"/>
-                <a:cs typeface="Noto Sans"/>
-              </a:rPr>
-              <a:t>  </a:t>
-            </a:r>
-          </a:p>
-          <a:p>
-            <a:pPr algn="l">
-              <a:lnSpc>
-                <a:spcPct val="112000"/>
-              </a:lnSpc>
-              <a:spcBef>
-                <a:spcPts val="0"/>
-              </a:spcBef>
-              <a:spcAft>
-                <a:spcPts val="0"/>
-              </a:spcAft>
-              <a:buNone/>
-              <a:defRPr sz="810" b="0">
-                <a:solidFill>
-                  <a:srgbClr val="303437"/>
-                </a:solidFill>
-                <a:latin typeface="Noto Sans"/>
-              </a:defRPr>
-            </a:pPr>
-            <a:r>
-              <a:rPr sz="810" b="0" lang="ja-JP" altLang="en-US">
-                <a:solidFill>
-                  <a:srgbClr val="626669"/>
-                </a:solidFill>
-                <a:latin typeface="Noto Sans"/>
-                <a:ea typeface="Noto Sans CJK JP"/>
-                <a:cs typeface="Noto Sans"/>
-                <a:hlinkClick r:id="rId3"/>
-              </a:rPr>
-              <a:t>https://arxiv.org/abs/2409.12640v2</a:t>
+                <a:hlinkClick r:id="rId7"/>
+              </a:rPr>
+              <a:t>https://github.com/google-deepmind/eval_hub/tree/master/eval_hub/mrcr_v2#readme</a:t>
             </a:r>
           </a:p>
         </p:txBody>
       </p:sp>
+      <p:pic>
+        <p:nvPicPr>
+          <p:cNvPr id="6" name="公式サイトの画面" descr="mrcr-v2.png"/>
+          <p:cNvPicPr>
+            <a:picLocks noChangeAspect="1"/>
+          </p:cNvPicPr>
+          <p:nvPr/>
+        </p:nvPicPr>
+        <p:blipFill>
+          <a:blip r:embed="rId6"/>
+          <a:stretch>
+            <a:fillRect/>
+          </a:stretch>
+        </p:blipFill>
+        <p:spPr>
+          <a:xfrm>
+            <a:off x="2274570" y="1481328"/>
+            <a:ext cx="4594858" cy="3063239"/>
+          </a:xfrm>
+          <a:prstGeom prst="rect">
+            <a:avLst/>
+          </a:prstGeom>
+        </p:spPr>
+      </p:pic>
     </p:spTree>
   </p:cSld>
   <p:clrMapOvr>
@@ -19133,7 +19078,7 @@
         </p:nvSpPr>
         <p:spPr>
           <a:xfrm>
-            <a:off x="594360" y="1389888"/>
+            <a:off x="594360" y="1418737"/>
             <a:ext cx="7955279" cy="210312"/>
           </a:xfrm>
           <a:prstGeom prst="rect">
@@ -19187,7 +19132,7 @@
         </p:nvSpPr>
         <p:spPr>
           <a:xfrm>
-            <a:off x="594360" y="1682496"/>
+            <a:off x="594360" y="1741392"/>
             <a:ext cx="7955279" cy="923544"/>
           </a:xfrm>
           <a:prstGeom prst="rect">
@@ -19241,7 +19186,7 @@
         </p:nvSpPr>
         <p:spPr>
           <a:xfrm>
-            <a:off x="594360" y="2724912"/>
+            <a:off x="594360" y="2503602"/>
             <a:ext cx="7955279" cy="640080"/>
           </a:xfrm>
           <a:prstGeom prst="rect">
@@ -19295,7 +19240,7 @@
         </p:nvSpPr>
         <p:spPr>
           <a:xfrm>
-            <a:off x="594360" y="3474720"/>
+            <a:off x="594360" y="3379385"/>
             <a:ext cx="7955279" cy="201168"/>
           </a:xfrm>
           <a:prstGeom prst="rect">
@@ -19349,7 +19294,7 @@
         </p:nvSpPr>
         <p:spPr>
           <a:xfrm>
-            <a:off x="548640" y="3707982"/>
+            <a:off x="548640" y="3708080"/>
             <a:ext cx="8046720" cy="810475"/>
           </a:xfrm>
           <a:prstGeom prst="rect">
@@ -19393,7 +19338,7 @@
         </p:nvSpPr>
         <p:spPr>
           <a:xfrm>
-            <a:off x="713232" y="3803904"/>
+            <a:off x="713232" y="3804001"/>
             <a:ext cx="7717536" cy="685800"/>
           </a:xfrm>
           <a:prstGeom prst="rect">
@@ -19652,7 +19597,7 @@
         </p:nvSpPr>
         <p:spPr>
           <a:xfrm>
-            <a:off x="594360" y="1389888"/>
+            <a:off x="594360" y="1736700"/>
             <a:ext cx="7955279" cy="210312"/>
           </a:xfrm>
           <a:prstGeom prst="rect">
@@ -19706,7 +19651,7 @@
         </p:nvSpPr>
         <p:spPr>
           <a:xfrm>
-            <a:off x="594360" y="1682496"/>
+            <a:off x="594360" y="2059355"/>
             <a:ext cx="7955279" cy="923544"/>
           </a:xfrm>
           <a:prstGeom prst="rect">
@@ -19760,7 +19705,7 @@
         </p:nvSpPr>
         <p:spPr>
           <a:xfrm>
-            <a:off x="594360" y="2724912"/>
+            <a:off x="594360" y="2821564"/>
             <a:ext cx="7955279" cy="640080"/>
           </a:xfrm>
           <a:prstGeom prst="rect">
@@ -19814,7 +19759,7 @@
         </p:nvSpPr>
         <p:spPr>
           <a:xfrm>
-            <a:off x="594360" y="3474720"/>
+            <a:off x="594360" y="3357344"/>
             <a:ext cx="7955279" cy="201168"/>
           </a:xfrm>
           <a:prstGeom prst="rect">
@@ -19868,7 +19813,7 @@
         </p:nvSpPr>
         <p:spPr>
           <a:xfrm>
-            <a:off x="548640" y="3707982"/>
+            <a:off x="548640" y="3686039"/>
             <a:ext cx="8046720" cy="514553"/>
           </a:xfrm>
           <a:prstGeom prst="rect">
@@ -19912,7 +19857,7 @@
         </p:nvSpPr>
         <p:spPr>
           <a:xfrm>
-            <a:off x="713232" y="3803904"/>
+            <a:off x="713232" y="3781961"/>
             <a:ext cx="7717536" cy="685800"/>
           </a:xfrm>
           <a:prstGeom prst="rect">
@@ -20171,7 +20116,7 @@
         </p:nvSpPr>
         <p:spPr>
           <a:xfrm>
-            <a:off x="594360" y="1389888"/>
+            <a:off x="594360" y="1418737"/>
             <a:ext cx="7955279" cy="210312"/>
           </a:xfrm>
           <a:prstGeom prst="rect">
@@ -20225,7 +20170,7 @@
         </p:nvSpPr>
         <p:spPr>
           <a:xfrm>
-            <a:off x="594360" y="1682496"/>
+            <a:off x="594360" y="1741392"/>
             <a:ext cx="7955279" cy="923544"/>
           </a:xfrm>
           <a:prstGeom prst="rect">
@@ -20279,7 +20224,7 @@
         </p:nvSpPr>
         <p:spPr>
           <a:xfrm>
-            <a:off x="594360" y="2724912"/>
+            <a:off x="594360" y="2503602"/>
             <a:ext cx="7955279" cy="640080"/>
           </a:xfrm>
           <a:prstGeom prst="rect">
@@ -20333,7 +20278,7 @@
         </p:nvSpPr>
         <p:spPr>
           <a:xfrm>
-            <a:off x="594360" y="3474720"/>
+            <a:off x="594360" y="3379385"/>
             <a:ext cx="7955279" cy="201168"/>
           </a:xfrm>
           <a:prstGeom prst="rect">
@@ -20387,7 +20332,7 @@
         </p:nvSpPr>
         <p:spPr>
           <a:xfrm>
-            <a:off x="548640" y="3707982"/>
+            <a:off x="548640" y="3708080"/>
             <a:ext cx="8046720" cy="810475"/>
           </a:xfrm>
           <a:prstGeom prst="rect">
@@ -20431,7 +20376,7 @@
         </p:nvSpPr>
         <p:spPr>
           <a:xfrm>
-            <a:off x="713232" y="3803904"/>
+            <a:off x="713232" y="3804001"/>
             <a:ext cx="7717536" cy="685800"/>
           </a:xfrm>
           <a:prstGeom prst="rect">
@@ -20690,7 +20635,7 @@
         </p:nvSpPr>
         <p:spPr>
           <a:xfrm>
-            <a:off x="594360" y="1389888"/>
+            <a:off x="594360" y="1418737"/>
             <a:ext cx="7955279" cy="210312"/>
           </a:xfrm>
           <a:prstGeom prst="rect">
@@ -20744,7 +20689,7 @@
         </p:nvSpPr>
         <p:spPr>
           <a:xfrm>
-            <a:off x="594360" y="1682496"/>
+            <a:off x="594360" y="1741392"/>
             <a:ext cx="7955279" cy="923544"/>
           </a:xfrm>
           <a:prstGeom prst="rect">
@@ -20798,7 +20743,7 @@
         </p:nvSpPr>
         <p:spPr>
           <a:xfrm>
-            <a:off x="594360" y="2724912"/>
+            <a:off x="594360" y="2503602"/>
             <a:ext cx="7955279" cy="640080"/>
           </a:xfrm>
           <a:prstGeom prst="rect">
@@ -20852,7 +20797,7 @@
         </p:nvSpPr>
         <p:spPr>
           <a:xfrm>
-            <a:off x="594360" y="3474720"/>
+            <a:off x="594360" y="3379385"/>
             <a:ext cx="7955279" cy="201168"/>
           </a:xfrm>
           <a:prstGeom prst="rect">
@@ -20906,7 +20851,7 @@
         </p:nvSpPr>
         <p:spPr>
           <a:xfrm>
-            <a:off x="548640" y="3707982"/>
+            <a:off x="548640" y="3708080"/>
             <a:ext cx="8046720" cy="810475"/>
           </a:xfrm>
           <a:prstGeom prst="rect">
@@ -20950,7 +20895,7 @@
         </p:nvSpPr>
         <p:spPr>
           <a:xfrm>
-            <a:off x="713232" y="3803904"/>
+            <a:off x="713232" y="3804001"/>
             <a:ext cx="7717536" cy="685800"/>
           </a:xfrm>
           <a:prstGeom prst="rect">
@@ -21209,7 +21154,7 @@
         </p:nvSpPr>
         <p:spPr>
           <a:xfrm>
-            <a:off x="594360" y="1389888"/>
+            <a:off x="594360" y="1418737"/>
             <a:ext cx="7955279" cy="210312"/>
           </a:xfrm>
           <a:prstGeom prst="rect">
@@ -21263,7 +21208,7 @@
         </p:nvSpPr>
         <p:spPr>
           <a:xfrm>
-            <a:off x="594360" y="1682496"/>
+            <a:off x="594360" y="1741392"/>
             <a:ext cx="7955279" cy="923544"/>
           </a:xfrm>
           <a:prstGeom prst="rect">
@@ -21317,7 +21262,7 @@
         </p:nvSpPr>
         <p:spPr>
           <a:xfrm>
-            <a:off x="594360" y="2724912"/>
+            <a:off x="594360" y="2503602"/>
             <a:ext cx="7955279" cy="640080"/>
           </a:xfrm>
           <a:prstGeom prst="rect">
@@ -21371,7 +21316,7 @@
         </p:nvSpPr>
         <p:spPr>
           <a:xfrm>
-            <a:off x="594360" y="3474720"/>
+            <a:off x="594360" y="3379385"/>
             <a:ext cx="7955279" cy="201168"/>
           </a:xfrm>
           <a:prstGeom prst="rect">
@@ -21425,7 +21370,7 @@
         </p:nvSpPr>
         <p:spPr>
           <a:xfrm>
-            <a:off x="548640" y="3707982"/>
+            <a:off x="548640" y="3708080"/>
             <a:ext cx="8046720" cy="810475"/>
           </a:xfrm>
           <a:prstGeom prst="rect">
@@ -21469,7 +21414,7 @@
         </p:nvSpPr>
         <p:spPr>
           <a:xfrm>
-            <a:off x="713232" y="3803904"/>
+            <a:off x="713232" y="3804001"/>
             <a:ext cx="7717536" cy="685800"/>
           </a:xfrm>
           <a:prstGeom prst="rect">
@@ -21728,7 +21673,7 @@
         </p:nvSpPr>
         <p:spPr>
           <a:xfrm>
-            <a:off x="594360" y="1389888"/>
+            <a:off x="594360" y="1566698"/>
             <a:ext cx="7955279" cy="210312"/>
           </a:xfrm>
           <a:prstGeom prst="rect">
@@ -21782,7 +21727,7 @@
         </p:nvSpPr>
         <p:spPr>
           <a:xfrm>
-            <a:off x="594360" y="1682496"/>
+            <a:off x="594360" y="1889354"/>
             <a:ext cx="7955279" cy="923544"/>
           </a:xfrm>
           <a:prstGeom prst="rect">
@@ -21836,7 +21781,7 @@
         </p:nvSpPr>
         <p:spPr>
           <a:xfrm>
-            <a:off x="594360" y="2724912"/>
+            <a:off x="594360" y="2651563"/>
             <a:ext cx="7955279" cy="640080"/>
           </a:xfrm>
           <a:prstGeom prst="rect">
@@ -21890,7 +21835,7 @@
         </p:nvSpPr>
         <p:spPr>
           <a:xfrm>
-            <a:off x="594360" y="3474720"/>
+            <a:off x="594360" y="3527345"/>
             <a:ext cx="7955279" cy="201168"/>
           </a:xfrm>
           <a:prstGeom prst="rect">
@@ -21944,7 +21889,7 @@
         </p:nvSpPr>
         <p:spPr>
           <a:xfrm>
-            <a:off x="548640" y="3707982"/>
+            <a:off x="548640" y="3856041"/>
             <a:ext cx="8046720" cy="514553"/>
           </a:xfrm>
           <a:prstGeom prst="rect">
@@ -21988,7 +21933,7 @@
         </p:nvSpPr>
         <p:spPr>
           <a:xfrm>
-            <a:off x="713232" y="3803904"/>
+            <a:off x="713232" y="3951962"/>
             <a:ext cx="7717536" cy="685800"/>
           </a:xfrm>
           <a:prstGeom prst="rect">
@@ -22247,7 +22192,7 @@
         </p:nvSpPr>
         <p:spPr>
           <a:xfrm>
-            <a:off x="594360" y="1389888"/>
+            <a:off x="594360" y="1566698"/>
             <a:ext cx="7955279" cy="210312"/>
           </a:xfrm>
           <a:prstGeom prst="rect">
@@ -22301,7 +22246,7 @@
         </p:nvSpPr>
         <p:spPr>
           <a:xfrm>
-            <a:off x="594360" y="1682496"/>
+            <a:off x="594360" y="1889354"/>
             <a:ext cx="7955279" cy="923544"/>
           </a:xfrm>
           <a:prstGeom prst="rect">
@@ -22355,7 +22300,7 @@
         </p:nvSpPr>
         <p:spPr>
           <a:xfrm>
-            <a:off x="594360" y="2724912"/>
+            <a:off x="594360" y="2651563"/>
             <a:ext cx="7955279" cy="640080"/>
           </a:xfrm>
           <a:prstGeom prst="rect">
@@ -22409,7 +22354,7 @@
         </p:nvSpPr>
         <p:spPr>
           <a:xfrm>
-            <a:off x="594360" y="3474720"/>
+            <a:off x="594360" y="3527345"/>
             <a:ext cx="7955279" cy="201168"/>
           </a:xfrm>
           <a:prstGeom prst="rect">
@@ -22463,7 +22408,7 @@
         </p:nvSpPr>
         <p:spPr>
           <a:xfrm>
-            <a:off x="548640" y="3707982"/>
+            <a:off x="548640" y="3856041"/>
             <a:ext cx="8046720" cy="514553"/>
           </a:xfrm>
           <a:prstGeom prst="rect">
@@ -22507,7 +22452,7 @@
         </p:nvSpPr>
         <p:spPr>
           <a:xfrm>
-            <a:off x="713232" y="3803904"/>
+            <a:off x="713232" y="3951962"/>
             <a:ext cx="7717536" cy="685800"/>
           </a:xfrm>
           <a:prstGeom prst="rect">
@@ -22766,7 +22711,7 @@
         </p:nvSpPr>
         <p:spPr>
           <a:xfrm>
-            <a:off x="594360" y="1389888"/>
+            <a:off x="594360" y="1418737"/>
             <a:ext cx="7955279" cy="210312"/>
           </a:xfrm>
           <a:prstGeom prst="rect">
@@ -22820,7 +22765,7 @@
         </p:nvSpPr>
         <p:spPr>
           <a:xfrm>
-            <a:off x="594360" y="1682496"/>
+            <a:off x="594360" y="1741392"/>
             <a:ext cx="7955279" cy="923544"/>
           </a:xfrm>
           <a:prstGeom prst="rect">
@@ -22874,7 +22819,7 @@
         </p:nvSpPr>
         <p:spPr>
           <a:xfrm>
-            <a:off x="594360" y="2724912"/>
+            <a:off x="594360" y="2503602"/>
             <a:ext cx="7955279" cy="640080"/>
           </a:xfrm>
           <a:prstGeom prst="rect">
@@ -22928,7 +22873,7 @@
         </p:nvSpPr>
         <p:spPr>
           <a:xfrm>
-            <a:off x="594360" y="3474720"/>
+            <a:off x="594360" y="3379385"/>
             <a:ext cx="7955279" cy="201168"/>
           </a:xfrm>
           <a:prstGeom prst="rect">
@@ -22982,7 +22927,7 @@
         </p:nvSpPr>
         <p:spPr>
           <a:xfrm>
-            <a:off x="548640" y="3707982"/>
+            <a:off x="548640" y="3708080"/>
             <a:ext cx="8046720" cy="810475"/>
           </a:xfrm>
           <a:prstGeom prst="rect">
@@ -23026,7 +22971,7 @@
         </p:nvSpPr>
         <p:spPr>
           <a:xfrm>
-            <a:off x="713232" y="3803904"/>
+            <a:off x="713232" y="3804001"/>
             <a:ext cx="7717536" cy="685800"/>
           </a:xfrm>
           <a:prstGeom prst="rect">
@@ -23285,7 +23230,7 @@
         </p:nvSpPr>
         <p:spPr>
           <a:xfrm>
-            <a:off x="594360" y="1389888"/>
+            <a:off x="594360" y="1418737"/>
             <a:ext cx="7955279" cy="210312"/>
           </a:xfrm>
           <a:prstGeom prst="rect">
@@ -23339,7 +23284,7 @@
         </p:nvSpPr>
         <p:spPr>
           <a:xfrm>
-            <a:off x="594360" y="1682496"/>
+            <a:off x="594360" y="1741392"/>
             <a:ext cx="7955279" cy="923544"/>
           </a:xfrm>
           <a:prstGeom prst="rect">
@@ -23393,7 +23338,7 @@
         </p:nvSpPr>
         <p:spPr>
           <a:xfrm>
-            <a:off x="594360" y="2724912"/>
+            <a:off x="594360" y="2503602"/>
             <a:ext cx="7955279" cy="640080"/>
           </a:xfrm>
           <a:prstGeom prst="rect">
@@ -23447,7 +23392,7 @@
         </p:nvSpPr>
         <p:spPr>
           <a:xfrm>
-            <a:off x="594360" y="3474720"/>
+            <a:off x="594360" y="3379385"/>
             <a:ext cx="7955279" cy="201168"/>
           </a:xfrm>
           <a:prstGeom prst="rect">
@@ -23501,7 +23446,7 @@
         </p:nvSpPr>
         <p:spPr>
           <a:xfrm>
-            <a:off x="548640" y="3707982"/>
+            <a:off x="548640" y="3708080"/>
             <a:ext cx="8046720" cy="810475"/>
           </a:xfrm>
           <a:prstGeom prst="rect">
@@ -23545,7 +23490,7 @@
         </p:nvSpPr>
         <p:spPr>
           <a:xfrm>
-            <a:off x="713232" y="3803904"/>
+            <a:off x="713232" y="3804001"/>
             <a:ext cx="7717536" cy="685800"/>
           </a:xfrm>
           <a:prstGeom prst="rect">
@@ -23918,7 +23863,7 @@
         </p:nvSpPr>
         <p:spPr>
           <a:xfrm>
-            <a:off x="594360" y="1389888"/>
+            <a:off x="594360" y="1418737"/>
             <a:ext cx="7955279" cy="210312"/>
           </a:xfrm>
           <a:prstGeom prst="rect">
@@ -23972,7 +23917,7 @@
         </p:nvSpPr>
         <p:spPr>
           <a:xfrm>
-            <a:off x="594360" y="1682496"/>
+            <a:off x="594360" y="1741392"/>
             <a:ext cx="7955279" cy="923544"/>
           </a:xfrm>
           <a:prstGeom prst="rect">
@@ -24026,7 +23971,7 @@
         </p:nvSpPr>
         <p:spPr>
           <a:xfrm>
-            <a:off x="594360" y="2724912"/>
+            <a:off x="594360" y="2503602"/>
             <a:ext cx="7955279" cy="640080"/>
           </a:xfrm>
           <a:prstGeom prst="rect">
@@ -24080,7 +24025,7 @@
         </p:nvSpPr>
         <p:spPr>
           <a:xfrm>
-            <a:off x="594360" y="3474720"/>
+            <a:off x="594360" y="3379385"/>
             <a:ext cx="7955279" cy="201168"/>
           </a:xfrm>
           <a:prstGeom prst="rect">
@@ -24134,7 +24079,7 @@
         </p:nvSpPr>
         <p:spPr>
           <a:xfrm>
-            <a:off x="548640" y="3707982"/>
+            <a:off x="548640" y="3708080"/>
             <a:ext cx="8046720" cy="810475"/>
           </a:xfrm>
           <a:prstGeom prst="rect">
@@ -24178,7 +24123,7 @@
         </p:nvSpPr>
         <p:spPr>
           <a:xfrm>
-            <a:off x="713232" y="3803904"/>
+            <a:off x="713232" y="3804001"/>
             <a:ext cx="7717536" cy="685800"/>
           </a:xfrm>
           <a:prstGeom prst="rect">
@@ -30911,7 +30856,7 @@
         </p:nvSpPr>
         <p:spPr>
           <a:xfrm>
-            <a:off x="594360" y="1389888"/>
+            <a:off x="594360" y="1418737"/>
             <a:ext cx="7955279" cy="210312"/>
           </a:xfrm>
           <a:prstGeom prst="rect">
@@ -30965,7 +30910,7 @@
         </p:nvSpPr>
         <p:spPr>
           <a:xfrm>
-            <a:off x="594360" y="1682496"/>
+            <a:off x="594360" y="1741392"/>
             <a:ext cx="7955279" cy="923544"/>
           </a:xfrm>
           <a:prstGeom prst="rect">
@@ -31019,7 +30964,7 @@
         </p:nvSpPr>
         <p:spPr>
           <a:xfrm>
-            <a:off x="594360" y="2724912"/>
+            <a:off x="594360" y="2503602"/>
             <a:ext cx="7955279" cy="640080"/>
           </a:xfrm>
           <a:prstGeom prst="rect">
@@ -31073,7 +31018,7 @@
         </p:nvSpPr>
         <p:spPr>
           <a:xfrm>
-            <a:off x="594360" y="3474720"/>
+            <a:off x="594360" y="3379385"/>
             <a:ext cx="7955279" cy="201168"/>
           </a:xfrm>
           <a:prstGeom prst="rect">
@@ -31127,7 +31072,7 @@
         </p:nvSpPr>
         <p:spPr>
           <a:xfrm>
-            <a:off x="548640" y="3707982"/>
+            <a:off x="548640" y="3708080"/>
             <a:ext cx="8046720" cy="810475"/>
           </a:xfrm>
           <a:prstGeom prst="rect">
@@ -31171,7 +31116,7 @@
         </p:nvSpPr>
         <p:spPr>
           <a:xfrm>
-            <a:off x="713232" y="3803904"/>
+            <a:off x="713232" y="3804001"/>
             <a:ext cx="7717536" cy="685800"/>
           </a:xfrm>
           <a:prstGeom prst="rect">

--- a/slides/datasets-in-10-minutes-mrcr-v2.pptx
+++ b/slides/datasets-in-10-minutes-mrcr-v2.pptx
@@ -7216,7 +7216,7 @@
                 <a:ea typeface="Noto Sans CJK JP"/>
                 <a:cs typeface="Noto Sans"/>
               </a:rPr>
-              <a:t>長い会話の中で、似た依頼の順序をたどる
+              <a:t>長い会話の中で似た依頼の順序をたどり、
 指定された過去の応答を再掲する評価</a:t>
             </a:r>
           </a:p>
@@ -8460,7 +8460,7 @@
                 <a:ea typeface="Noto Sans CJK JP"/>
                 <a:cs typeface="Noto Sans"/>
               </a:rPr>
-              <a:t>「古代の神話」を題材にした、ユーモラスな文体のエッセイの1番目を再掲する。</a:t>
+              <a:t>要旨：「古代の神話」を題材にした、ユーモラスな文体のエッセイの1番目を再掲する。</a:t>
             </a:r>
           </a:p>
         </p:txBody>
@@ -10246,7 +10246,7 @@
                 <a:ea typeface="Noto Sans CJK JP"/>
                 <a:cs typeface="Noto Sans"/>
               </a:rPr>
-              <a:t>一致する依頼への応答を出現順に抜粋。太字が指定対象。</a:t>
+              <a:t>一致する依頼への応答を出現順に抜粋。</a:t>
             </a:r>
           </a:p>
         </p:txBody>
@@ -10613,7 +10613,7 @@
                 <a:ea typeface="Noto Sans CJK JP"/>
                 <a:cs typeface="Noto Sans"/>
               </a:rPr>
-              <a:t>「宇宙探査」を題材にした、改まった文体のエッセイの4番目を再掲する。</a:t>
+              <a:t>要旨：「宇宙探査」を題材にした、改まった文体の4番目のエッセイを再掲する。</a:t>
             </a:r>
           </a:p>
         </p:txBody>
@@ -16231,7 +16231,7 @@
                 <a:ea typeface="Noto Sans CJK JP"/>
                 <a:cs typeface="Noto Sans"/>
               </a:rPr>
-              <a:t>会話を長くする区間と、needle数を選べる</a:t>
+              <a:t>会話の長さの区間と、needle数を選べる</a:t>
             </a:r>
           </a:p>
         </p:txBody>
@@ -16812,7 +16812,7 @@
                           <a:ea typeface="Noto Sans CJK JP"/>
                           <a:cs typeface="Noto Sans"/>
                         </a:rPr>
-                        <a:t>1M、2M、4M、8Mに向かう区間を配布</a:t>
+                        <a:t>1M、2M、4M、8Mに至る区間を配布</a:t>
                       </a:r>
                     </a:p>
                   </a:txBody>
@@ -18025,7 +18025,7 @@
                 <a:ea typeface="Noto Sans CJK JP"/>
                 <a:cs typeface="Noto Sans"/>
               </a:rPr>
-              <a:t>長文の中で、似た依頼と順序を保って追えるか</a:t>
+              <a:t>長文の中で、似た依頼を順序通りに追えるか</a:t>
             </a:r>
           </a:p>
         </p:txBody>
@@ -19282,7 +19282,7 @@
                 <a:ea typeface="Noto Sans CJK JP"/>
                 <a:cs typeface="Noto Sans"/>
               </a:rPr>
-              <a:t>「ペンギン」を題材にした、技術的な文体のツイートの2番目を再掲する。</a:t>
+              <a:t>要旨：「ペンギン」を題材にした、技術的な文体のツイートの2番目を再掲する。</a:t>
             </a:r>
           </a:p>
         </p:txBody>
@@ -19801,7 +19801,7 @@
                 <a:ea typeface="Noto Sans CJK JP"/>
                 <a:cs typeface="Noto Sans"/>
               </a:rPr>
-              <a:t>「宇宙探査」を題材にした、古風な文体の詩の1番目を再掲する。</a:t>
+              <a:t>要旨：「宇宙探査」を題材にした、古風な文体の詩の1番目を再掲する。</a:t>
             </a:r>
           </a:p>
         </p:txBody>
@@ -20320,7 +20320,7 @@
                 <a:ea typeface="Noto Sans CJK JP"/>
                 <a:cs typeface="Noto Sans"/>
               </a:rPr>
-              <a:t>「フラミンゴ」を題材にした、くだけた文体のなぞなぞの1番目を再掲する。</a:t>
+              <a:t>要旨：「フラミンゴ」を題材にした、くだけた文体のなぞなぞの1番目を再掲する。</a:t>
             </a:r>
           </a:p>
         </p:txBody>
@@ -20839,7 +20839,7 @@
                 <a:ea typeface="Noto Sans CJK JP"/>
                 <a:cs typeface="Noto Sans"/>
               </a:rPr>
-              <a:t>「架空の製品発表」を題材にした、くだけた文体の詩の2番目を再掲する。</a:t>
+              <a:t>要旨：「架空の製品発表」を題材にした、くだけた文体の詩の2番目を再掲する。</a:t>
             </a:r>
           </a:p>
         </p:txBody>
@@ -21358,7 +21358,7 @@
                 <a:ea typeface="Noto Sans CJK JP"/>
                 <a:cs typeface="Noto Sans"/>
               </a:rPr>
-              <a:t>「園芸のコツ」を題材にした、古風な文体の短編小説の2番目を再掲する。</a:t>
+              <a:t>要旨：「園芸のコツ」を題材にした、古風な文体の短編小説の2番目を再掲する。</a:t>
             </a:r>
           </a:p>
         </p:txBody>
@@ -21877,7 +21877,7 @@
                 <a:ea typeface="Noto Sans CJK JP"/>
                 <a:cs typeface="Noto Sans"/>
               </a:rPr>
-              <a:t>「園芸のコツ」を題材にした、ユーモラスな文体の詩の1番目を再掲する。</a:t>
+              <a:t>要旨：「園芸のコツ」を題材にした、ユーモラスな文体の1番目の詩を再掲する。</a:t>
             </a:r>
           </a:p>
         </p:txBody>
@@ -22396,7 +22396,7 @@
                 <a:ea typeface="Noto Sans CJK JP"/>
                 <a:cs typeface="Noto Sans"/>
               </a:rPr>
-              <a:t>「ペンギン」を題材にした、ユーモラスな文体の詩の5番目を再掲する。</a:t>
+              <a:t>要旨：「ペンギン」を題材にした、ユーモラスな文体の詩の5番目を再掲する。</a:t>
             </a:r>
           </a:p>
         </p:txBody>
@@ -22915,7 +22915,7 @@
                 <a:ea typeface="Noto Sans CJK JP"/>
                 <a:cs typeface="Noto Sans"/>
               </a:rPr>
-              <a:t>「古代の神話」を題材にした、技術的な文体の短編小説の4番目を再掲する。</a:t>
+              <a:t>要旨：「古代の神話」を題材にした、技術的な文体の短編小説の4番目を再掲する。</a:t>
             </a:r>
           </a:p>
         </p:txBody>
@@ -23434,7 +23434,7 @@
                 <a:ea typeface="Noto Sans CJK JP"/>
                 <a:cs typeface="Noto Sans"/>
               </a:rPr>
-              <a:t>「架空の製品発表」を題材にした、改まった文体のブログ記事の2番目を再掲する。</a:t>
+              <a:t>要旨：「架空の製品発表」を題材にした、改まった文体のブログ記事の2番目を再掲する。</a:t>
             </a:r>
           </a:p>
         </p:txBody>
@@ -24067,7 +24067,7 @@
                 <a:ea typeface="Noto Sans CJK JP"/>
                 <a:cs typeface="Noto Sans"/>
               </a:rPr>
-              <a:t>「架空の製品発表」を題材にした、古風な文体のツイートの1番目を再掲する。</a:t>
+              <a:t>要旨：「架空の製品発表」を題材にした、古風な文体のツイートの1番目を再掲する。</a:t>
             </a:r>
           </a:p>
         </p:txBody>
@@ -25474,7 +25474,7 @@
                 <a:ea typeface="Noto Sans CJK JP"/>
                 <a:cs typeface="Noto Sans"/>
               </a:rPr>
-              <a:t>平均長はCSVのcontext_len（トークン）。会話は最終指示を除いて重複排除。</a:t>
+              <a:t>平均長はCSVのcontext_len（トークン）。会話は最終指示を除いて重複を排除。</a:t>
             </a:r>
           </a:p>
         </p:txBody>
@@ -27368,7 +27368,7 @@
                 <a:ea typeface="Noto Sans CJK JP"/>
                 <a:cs typeface="Noto Sans"/>
               </a:rPr>
-              <a:t>OpenAIも2025年に、別のMRCRデータをHugging Faceで公開している。こちらは、2025年12月に対象応答の数と正解の誤りを修正した。</a:t>
+              <a:t>OpenAIも2025年に、別のMRCRデータをHugging Faceで公開している。こちらは、2025年12月に対象応答の数と正解の誤りが修正された。</a:t>
             </a:r>
           </a:p>
           <a:p>
@@ -27733,7 +27733,7 @@
                 <a:ea typeface="Noto Sans CJK JP"/>
                 <a:cs typeface="Noto Sans"/>
               </a:rPr>
-              <a:t>本資料は最短の4K〜8K区間のCSV3本を取得した。より長い区間はdownload.shで選んで取得できる。</a:t>
+              <a:t>本資料では最短の4K〜8K区間のCSV3本を取得した。より長い区間はdownload.shで選んで取得できる。</a:t>
             </a:r>
           </a:p>
         </p:txBody>
@@ -28122,7 +28122,7 @@
                 <a:ea typeface="Noto Sans CJK JP"/>
                 <a:cs typeface="Noto Sans"/>
               </a:rPr>
-              <a:t>MRCRを説明したMichelangelo論文の第一著者はKiran Vodrahalli、最終著者はKate Olszewska。Google DeepMindとGoogle Researchの研究として2024年に公開された。</a:t>
+              <a:t>MRCRを提案したMichelangelo論文の第一著者はKiran Vodrahalli、最終著者はKate Olszewska。Google DeepMindとGoogle Researchの研究として2024年に公開された。</a:t>
             </a:r>
           </a:p>
           <a:p>
@@ -28182,7 +28182,7 @@
                 <a:ea typeface="Noto Sans CJK JP"/>
                 <a:cs typeface="Noto Sans"/>
               </a:rPr>
-              <a:t>公開v2はGoogle DeepMindのeval_hubに収録され、モデルカードの数値を再現するためのデータと評価コードを提供する。</a:t>
+              <a:t>公開版のv2はGoogle DeepMindのeval_hubに収録され、モデルカードの数値を再現するためのデータと評価コードを提供する。</a:t>
             </a:r>
           </a:p>
         </p:txBody>
@@ -29620,7 +29620,7 @@
                 <a:ea typeface="Noto Sans CJK JP"/>
                 <a:cs typeface="Noto Sans"/>
               </a:rPr>
-              <a:t>長文から一つの目印を探すだけの評価に対して、MRCRは似た依頼を複数置く。同じ題材でも、文章の形式や文体が異なる。</a:t>
+              <a:t>長文から一つの目印を探すだけの評価に対して、MRCR（Multi-round Coreference Resolution）は似た依頼を複数置く。同じ題材でも、文章の形式や文体が異なる。</a:t>
             </a:r>
           </a:p>
           <a:p>
@@ -29680,7 +29680,7 @@
                 <a:ea typeface="Noto Sans CJK JP"/>
                 <a:cs typeface="Noto Sans"/>
               </a:rPr>
-              <a:t>会話を長くしながら、同じ処理を続けられるかを調べる。MRCRはMulti-round Coreference Resolutionの略。</a:t>
+              <a:t>会話を長くしながら、同じ処理を続けられるかを調べる。</a:t>
             </a:r>
           </a:p>
         </p:txBody>
@@ -31060,7 +31060,7 @@
                 <a:ea typeface="Noto Sans CJK JP"/>
                 <a:cs typeface="Noto Sans"/>
               </a:rPr>
-              <a:t>「園芸のコツ」を題材にした、くだけた文体の短編小説の2番目を再掲する。</a:t>
+              <a:t>要旨：「園芸のコツ」を題材にした、くだけた文体の短編小説の2番目を再掲する。</a:t>
             </a:r>
           </a:p>
         </p:txBody>
